--- a/presentations/group/animations/GeometryOfAbsorption.pptx
+++ b/presentations/group/animations/GeometryOfAbsorption.pptx
@@ -13,6 +13,7 @@
     <p:sldId id="261" r:id="rId12"/>
     <p:sldId id="262" r:id="rId13"/>
     <p:sldId id="263" r:id="rId14"/>
+    <p:sldId id="264" r:id="rId15"/>
   </p:sldIdLst>
   <p:sldSz cx="12192000" cy="6858000" type="screen4x3"/>
   <p:notesSz cx="6858000" cy="9144000"/>
@@ -3389,7 +3390,7 @@
       <p:grpSpPr/>
       <p:pic>
         <p:nvPicPr>
-          <p:cNvPr id="2" name="6689283c3823a7e071f7d81c7417248dd71a291b5bfc63ea9d554f67def146b1.mp4">
+          <p:cNvPr id="2" name="cd34786c387abcbcb40c4751abec02cc5c42a559626ad39d0a4b17be5db931fe.mp4">
             <a:hlinkClick r:id="" action="ppaction://media"/>
           </p:cNvPr>
           <p:cNvPicPr>
@@ -3462,7 +3463,7 @@
       <p:grpSpPr/>
       <p:pic>
         <p:nvPicPr>
-          <p:cNvPr id="2" name="bf3deb9b655e07c86ab2510919362c12c7de5f90ac88a8d223e67504470c3ebe.mp4">
+          <p:cNvPr id="2" name="e2e40facc6705923bdca425dddba3282dfe49280c5da00b640cf4bb087be703e.mp4">
             <a:hlinkClick r:id="" action="ppaction://media"/>
           </p:cNvPr>
           <p:cNvPicPr>
@@ -3535,7 +3536,7 @@
       <p:grpSpPr/>
       <p:pic>
         <p:nvPicPr>
-          <p:cNvPr id="2" name="f9b3feabadf1fdf7aa25ac76ee554db30d781f85541fc0628ec184e634d76816.mp4">
+          <p:cNvPr id="2" name="2427fd0770c6189bd7dc4608dd906170498a980978eda313fff514fb87516052.mp4">
             <a:hlinkClick r:id="" action="ppaction://media"/>
           </p:cNvPr>
           <p:cNvPicPr>
@@ -3608,7 +3609,80 @@
       <p:grpSpPr/>
       <p:pic>
         <p:nvPicPr>
-          <p:cNvPr id="2" name="e06bf76e9a0ba48d9735a0bbf4639e6570d5cb5ba4236ab78d307a39ef730da9.mp4">
+          <p:cNvPr id="2" name="1009faa2a4fb0e3951e7fc9e2df34f63f53759a46cdf5052d996f4b76dfccc1d.mp4">
+            <a:hlinkClick r:id="" action="ppaction://media"/>
+          </p:cNvPr>
+          <p:cNvPicPr>
+            <a:picLocks noChangeAspect="1"/>
+          </p:cNvPicPr>
+          <p:nvPr>
+            <a:videoFile r:link="rId3"/>
+            <p:extLst>
+              <p:ext uri="{DAA4B4D4-6D71-4841-9C94-3DE7FCFB9230}">
+                <p14:media xmlns:p14="http://schemas.microsoft.com/office/powerpoint/2010/main" r:embed="rId2"/>
+              </p:ext>
+            </p:extLst>
+          </p:nvPr>
+        </p:nvPicPr>
+        <p:blipFill>
+          <a:blip r:embed="rId4"/>
+          <a:stretch>
+            <a:fillRect/>
+          </a:stretch>
+        </p:blipFill>
+        <p:spPr>
+          <a:xfrm>
+            <a:off x="0" y="0"/>
+            <a:ext cx="12192000" cy="6858000"/>
+          </a:xfrm>
+          <a:prstGeom prst="rect">
+            <a:avLst/>
+          </a:prstGeom>
+        </p:spPr>
+      </p:pic>
+    </p:spTree>
+  </p:cSld>
+  <p:clrMapOvr>
+    <a:masterClrMapping/>
+  </p:clrMapOvr>
+  <p:timing>
+    <p:tnLst>
+      <p:par>
+        <p:cTn id="1" dur="indefinite" restart="never" nodeType="tmRoot">
+          <p:childTnLst>
+            <p:video>
+              <p:cMediaNode vol="80000">
+                <p:cTn id="2" fill="hold" display="0">
+                  <p:stCondLst>
+                    <p:cond delay="0"/>
+                  </p:stCondLst>
+                </p:cTn>
+                <p:tgtEl>
+                  <p:spTgt spid="2"/>
+                </p:tgtEl>
+              </p:cMediaNode>
+            </p:video>
+          </p:childTnLst>
+        </p:cTn>
+      </p:par>
+    </p:tnLst>
+  </p:timing>
+</p:sld>
+</file>
+
+<file path=ppt/slides/slide9.xml><?xml version="1.0" encoding="utf-8"?>
+<p:sld xmlns:a="http://schemas.openxmlformats.org/drawingml/2006/main" xmlns:p="http://schemas.openxmlformats.org/presentationml/2006/main" xmlns:r="http://schemas.openxmlformats.org/officeDocument/2006/relationships">
+  <p:cSld>
+    <p:spTree>
+      <p:nvGrpSpPr>
+        <p:cNvPr id="1" name=""/>
+        <p:cNvGrpSpPr/>
+        <p:nvPr/>
+      </p:nvGrpSpPr>
+      <p:grpSpPr/>
+      <p:pic>
+        <p:nvPicPr>
+          <p:cNvPr id="2" name="a9d9d5af5c155d7f3c0c579768ddefccd00f676fd5f323e43a8f661b38972a83.mp4">
             <a:hlinkClick r:id="" action="ppaction://media"/>
           </p:cNvPr>
           <p:cNvPicPr>
